--- a/weekly_presentations/week08_options_mm_hedging.pptx
+++ b/weekly_presentations/week08_options_mm_hedging.pptx
@@ -14,6 +14,7 @@
     <p:sldId id="262" r:id="rId13"/>
     <p:sldId id="263" r:id="rId14"/>
     <p:sldId id="264" r:id="rId15"/>
+    <p:sldId id="265" r:id="rId16"/>
   </p:sldIdLst>
   <p:sldSz cx="12191695" cy="6858000" type="screen4x3"/>
   <p:notesSz cx="6858000" cy="9144000"/>
@@ -3250,6 +3251,164 @@
 </p:sld>
 </file>
 
+<file path=ppt/slides/slide10.xml><?xml version="1.0" encoding="utf-8"?>
+<p:sld xmlns:a="http://schemas.openxmlformats.org/drawingml/2006/main" xmlns:p="http://schemas.openxmlformats.org/presentationml/2006/main" xmlns:r="http://schemas.openxmlformats.org/officeDocument/2006/relationships">
+  <p:cSld>
+    <p:spTree>
+      <p:nvGrpSpPr>
+        <p:cNvPr id="1" name=""/>
+        <p:cNvGrpSpPr/>
+        <p:nvPr/>
+      </p:nvGrpSpPr>
+      <p:grpSpPr/>
+      <p:pic>
+        <p:nvPicPr>
+          <p:cNvPr id="2" name="Picture 1" descr="ncsu_logo.png"/>
+          <p:cNvPicPr>
+            <a:picLocks noChangeAspect="1"/>
+          </p:cNvPicPr>
+          <p:nvPr/>
+        </p:nvPicPr>
+        <p:blipFill>
+          <a:blip r:embed="rId2"/>
+          <a:stretch>
+            <a:fillRect/>
+          </a:stretch>
+        </p:blipFill>
+        <p:spPr>
+          <a:xfrm>
+            <a:off x="9784080" y="274320"/>
+            <a:ext cx="2011680" cy="316653"/>
+          </a:xfrm>
+          <a:prstGeom prst="rect">
+            <a:avLst/>
+          </a:prstGeom>
+        </p:spPr>
+      </p:pic>
+      <p:sp>
+        <p:nvSpPr>
+          <p:cNvPr id="3" name="TextBox 2"/>
+          <p:cNvSpPr txBox="1"/>
+          <p:nvPr/>
+        </p:nvSpPr>
+        <p:spPr>
+          <a:xfrm>
+            <a:off x="457200" y="457200"/>
+            <a:ext cx="8961120" cy="822960"/>
+          </a:xfrm>
+          <a:prstGeom prst="rect">
+            <a:avLst/>
+          </a:prstGeom>
+          <a:noFill/>
+        </p:spPr>
+        <p:txBody>
+          <a:bodyPr wrap="square">
+            <a:spAutoFit/>
+          </a:bodyPr>
+          <a:lstStyle/>
+          <a:p>
+            <a:r>
+              <a:rPr sz="2400" b="1" i="0">
+                <a:solidFill>
+                  <a:srgbClr val="990000"/>
+                </a:solidFill>
+                <a:latin typeface="Arial"/>
+              </a:rPr>
+              <a:t>Reading</a:t>
+            </a:r>
+          </a:p>
+        </p:txBody>
+      </p:sp>
+      <p:sp>
+        <p:nvSpPr>
+          <p:cNvPr id="4" name="Rectangle 3"/>
+          <p:cNvSpPr/>
+          <p:nvPr/>
+        </p:nvSpPr>
+        <p:spPr>
+          <a:xfrm>
+            <a:off x="457200" y="1371600"/>
+            <a:ext cx="11247120" cy="27940"/>
+          </a:xfrm>
+          <a:prstGeom prst="rect">
+            <a:avLst/>
+          </a:prstGeom>
+          <a:solidFill>
+            <a:srgbClr val="CC0000"/>
+          </a:solidFill>
+          <a:ln>
+            <a:noFill/>
+          </a:ln>
+        </p:spPr>
+        <p:style>
+          <a:lnRef idx="1">
+            <a:schemeClr val="accent1"/>
+          </a:lnRef>
+          <a:fillRef idx="3">
+            <a:schemeClr val="accent1"/>
+          </a:fillRef>
+          <a:effectRef idx="2">
+            <a:schemeClr val="accent1"/>
+          </a:effectRef>
+          <a:fontRef idx="minor">
+            <a:schemeClr val="lt1"/>
+          </a:fontRef>
+        </p:style>
+        <p:txBody>
+          <a:bodyPr rtlCol="0" anchor="ctr"/>
+          <a:lstStyle/>
+          <a:p>
+            <a:pPr algn="ctr"/>
+          </a:p>
+        </p:txBody>
+      </p:sp>
+      <p:sp>
+        <p:nvSpPr>
+          <p:cNvPr id="5" name="TextBox 4"/>
+          <p:cNvSpPr txBox="1"/>
+          <p:nvPr/>
+        </p:nvSpPr>
+        <p:spPr>
+          <a:xfrm>
+            <a:off x="640080" y="1600200"/>
+            <a:ext cx="10972800" cy="4937760"/>
+          </a:xfrm>
+          <a:prstGeom prst="rect">
+            <a:avLst/>
+          </a:prstGeom>
+          <a:noFill/>
+        </p:spPr>
+        <p:txBody>
+          <a:bodyPr wrap="square">
+            <a:spAutoFit/>
+          </a:bodyPr>
+          <a:lstStyle/>
+          <a:p>
+            <a:pPr>
+              <a:spcAft>
+                <a:spcPts val="800"/>
+              </a:spcAft>
+            </a:pPr>
+            <a:r>
+              <a:rPr sz="1700" b="0" i="0">
+                <a:solidFill>
+                  <a:srgbClr val="1A1A1A"/>
+                </a:solidFill>
+                <a:latin typeface="Arial"/>
+              </a:rPr>
+              <a:t>•  El Aoud-Abergel (2015); Taleb (1997); Cartea et al., Ch. 11</a:t>
+            </a:r>
+          </a:p>
+        </p:txBody>
+      </p:sp>
+    </p:spTree>
+  </p:cSld>
+  <p:clrMapOvr>
+    <a:masterClrMapping/>
+  </p:clrMapOvr>
+</p:sld>
+</file>
+
 <file path=ppt/slides/slide2.xml><?xml version="1.0" encoding="utf-8"?>
 <p:sld xmlns:a="http://schemas.openxmlformats.org/drawingml/2006/main" xmlns:p="http://schemas.openxmlformats.org/presentationml/2006/main" xmlns:r="http://schemas.openxmlformats.org/officeDocument/2006/relationships">
   <p:cSld>
@@ -4691,7 +4850,7 @@
           <a:noFill/>
         </p:spPr>
         <p:txBody>
-          <a:bodyPr wrap="square">
+          <a:bodyPr wrap="none">
             <a:spAutoFit/>
           </a:bodyPr>
           <a:lstStyle/>
@@ -4703,7 +4862,7 @@
                 </a:solidFill>
                 <a:latin typeface="Arial"/>
               </a:rPr>
-              <a:t>Reading</a:t>
+              <a:t>Glossary — Key Terms</a:t>
             </a:r>
           </a:p>
         </p:txBody>
@@ -4775,17 +4934,176 @@
           <a:p>
             <a:pPr>
               <a:spcAft>
-                <a:spcPts val="800"/>
+                <a:spcPts val="700"/>
               </a:spcAft>
             </a:pPr>
             <a:r>
-              <a:rPr sz="1700" b="0" i="0">
+              <a:rPr sz="1500" b="1" i="0">
+                <a:solidFill>
+                  <a:srgbClr val="CC0000"/>
+                </a:solidFill>
+                <a:latin typeface="Arial"/>
+              </a:rPr>
+              <a:t>Greek inventory vector — </a:t>
+            </a:r>
+            <a:r>
+              <a:rPr sz="1500" b="0" i="0">
                 <a:solidFill>
                   <a:srgbClr val="1A1A1A"/>
                 </a:solidFill>
                 <a:latin typeface="Arial"/>
               </a:rPr>
-              <a:t>•  El Aoud-Abergel (2015); Taleb (1997); Cartea et al., Ch. 11</a:t>
+              <a:t>aggregated (delta, gamma, vega, ...) exposure of the book</a:t>
+            </a:r>
+          </a:p>
+          <a:p>
+            <a:pPr>
+              <a:spcAft>
+                <a:spcPts val="700"/>
+              </a:spcAft>
+            </a:pPr>
+            <a:r>
+              <a:rPr sz="1500" b="1" i="0">
+                <a:solidFill>
+                  <a:srgbClr val="CC0000"/>
+                </a:solidFill>
+                <a:latin typeface="Arial"/>
+              </a:rPr>
+              <a:t>Quadratic penalty — </a:t>
+            </a:r>
+            <a:r>
+              <a:rPr sz="1500" b="0" i="0">
+                <a:solidFill>
+                  <a:srgbClr val="1A1A1A"/>
+                </a:solidFill>
+                <a:latin typeface="Arial"/>
+              </a:rPr>
+              <a:t>the risk term (1/2) q^T Sigma q on the Greek vector</a:t>
+            </a:r>
+          </a:p>
+          <a:p>
+            <a:pPr>
+              <a:spcAft>
+                <a:spcPts val="700"/>
+              </a:spcAft>
+            </a:pPr>
+            <a:r>
+              <a:rPr sz="1500" b="1" i="0">
+                <a:solidFill>
+                  <a:srgbClr val="CC0000"/>
+                </a:solidFill>
+                <a:latin typeface="Arial"/>
+              </a:rPr>
+              <a:t>Delta hedging — </a:t>
+            </a:r>
+            <a:r>
+              <a:rPr sz="1500" b="0" i="0">
+                <a:solidFill>
+                  <a:srgbClr val="1A1A1A"/>
+                </a:solidFill>
+                <a:latin typeface="Arial"/>
+              </a:rPr>
+              <a:t>neutralizing directional risk using the underlying or a perpetual</a:t>
+            </a:r>
+          </a:p>
+          <a:p>
+            <a:pPr>
+              <a:spcAft>
+                <a:spcPts val="700"/>
+              </a:spcAft>
+            </a:pPr>
+            <a:r>
+              <a:rPr sz="1500" b="1" i="0">
+                <a:solidFill>
+                  <a:srgbClr val="CC0000"/>
+                </a:solidFill>
+                <a:latin typeface="Arial"/>
+              </a:rPr>
+              <a:t>Gamma scalping — </a:t>
+            </a:r>
+            <a:r>
+              <a:rPr sz="1500" b="0" i="0">
+                <a:solidFill>
+                  <a:srgbClr val="1A1A1A"/>
+                </a:solidFill>
+                <a:latin typeface="Arial"/>
+              </a:rPr>
+              <a:t>P&amp;L earned by re-hedging a long-gamma position</a:t>
+            </a:r>
+          </a:p>
+          <a:p>
+            <a:pPr>
+              <a:spcAft>
+                <a:spcPts val="700"/>
+              </a:spcAft>
+            </a:pPr>
+            <a:r>
+              <a:rPr sz="1500" b="1" i="0">
+                <a:solidFill>
+                  <a:srgbClr val="CC0000"/>
+                </a:solidFill>
+                <a:latin typeface="Arial"/>
+              </a:rPr>
+              <a:t>Gamma-theta-variance identity — </a:t>
+            </a:r>
+            <a:r>
+              <a:rPr sz="1500" b="0" i="0">
+                <a:solidFill>
+                  <a:srgbClr val="1A1A1A"/>
+                </a:solidFill>
+                <a:latin typeface="Arial"/>
+              </a:rPr>
+              <a:t>hedged P&amp;L = (1/2) Gamma S^2 (realized var - implied var) dt</a:t>
+            </a:r>
+          </a:p>
+          <a:p>
+            <a:pPr>
+              <a:spcAft>
+                <a:spcPts val="700"/>
+              </a:spcAft>
+            </a:pPr>
+            <a:r>
+              <a:rPr sz="1500" b="1" i="0">
+                <a:solidFill>
+                  <a:srgbClr val="CC0000"/>
+                </a:solidFill>
+                <a:latin typeface="Arial"/>
+              </a:rPr>
+              <a:t>Funding rate — </a:t>
+            </a:r>
+            <a:r>
+              <a:rPr sz="1500" b="0" i="0">
+                <a:solidFill>
+                  <a:srgbClr val="1A1A1A"/>
+                </a:solidFill>
+                <a:latin typeface="Arial"/>
+              </a:rPr>
+              <a:t>periodic payment between perpetual-swap longs and shorts</a:t>
+            </a:r>
+          </a:p>
+          <a:p>
+            <a:pPr>
+              <a:spcAft>
+                <a:spcPts val="700"/>
+              </a:spcAft>
+            </a:pPr>
+            <a:r>
+              <a:rPr sz="1500" b="1" i="0">
+                <a:solidFill>
+                  <a:srgbClr val="CC0000"/>
+                </a:solidFill>
+                <a:latin typeface="Arial"/>
+              </a:rPr>
+              <a:t>El Aoud-Abergel — </a:t>
+            </a:r>
+            <a:r>
+              <a:rPr sz="1500" b="0" i="0">
+                <a:solidFill>
+                  <a:srgbClr val="1A1A1A"/>
+                </a:solidFill>
+                <a:latin typeface="Arial"/>
+              </a:rPr>
+              <a:t>the multi-Greek option market-making framework</a:t>
             </a:r>
           </a:p>
         </p:txBody>

--- a/weekly_presentations/week08_options_mm_hedging.pptx
+++ b/weekly_presentations/week08_options_mm_hedging.pptx
@@ -15,6 +15,7 @@
     <p:sldId id="263" r:id="rId14"/>
     <p:sldId id="264" r:id="rId15"/>
     <p:sldId id="265" r:id="rId16"/>
+    <p:sldId id="266" r:id="rId17"/>
   </p:sldIdLst>
   <p:sldSz cx="12191695" cy="6858000" type="screen4x3"/>
   <p:notesSz cx="6858000" cy="9144000"/>
@@ -3397,6 +3398,196 @@
                 <a:latin typeface="Arial"/>
               </a:rPr>
               <a:t>•  El Aoud-Abergel (2015); Taleb (1997); Cartea et al., Ch. 11</a:t>
+            </a:r>
+          </a:p>
+        </p:txBody>
+      </p:sp>
+    </p:spTree>
+  </p:cSld>
+  <p:clrMapOvr>
+    <a:masterClrMapping/>
+  </p:clrMapOvr>
+</p:sld>
+</file>
+
+<file path=ppt/slides/slide11.xml><?xml version="1.0" encoding="utf-8"?>
+<p:sld xmlns:a="http://schemas.openxmlformats.org/drawingml/2006/main" xmlns:p="http://schemas.openxmlformats.org/presentationml/2006/main" xmlns:r="http://schemas.openxmlformats.org/officeDocument/2006/relationships">
+  <p:cSld>
+    <p:spTree>
+      <p:nvGrpSpPr>
+        <p:cNvPr id="1" name=""/>
+        <p:cNvGrpSpPr/>
+        <p:nvPr/>
+      </p:nvGrpSpPr>
+      <p:grpSpPr/>
+      <p:pic>
+        <p:nvPicPr>
+          <p:cNvPr id="2" name="Picture 1" descr="ncsu_logo.png"/>
+          <p:cNvPicPr>
+            <a:picLocks noChangeAspect="1"/>
+          </p:cNvPicPr>
+          <p:nvPr/>
+        </p:nvPicPr>
+        <p:blipFill>
+          <a:blip r:embed="rId2"/>
+          <a:stretch>
+            <a:fillRect/>
+          </a:stretch>
+        </p:blipFill>
+        <p:spPr>
+          <a:xfrm>
+            <a:off x="9784080" y="274320"/>
+            <a:ext cx="2011680" cy="316653"/>
+          </a:xfrm>
+          <a:prstGeom prst="rect">
+            <a:avLst/>
+          </a:prstGeom>
+        </p:spPr>
+      </p:pic>
+      <p:sp>
+        <p:nvSpPr>
+          <p:cNvPr id="3" name="TextBox 2"/>
+          <p:cNvSpPr txBox="1"/>
+          <p:nvPr/>
+        </p:nvSpPr>
+        <p:spPr>
+          <a:xfrm>
+            <a:off x="457200" y="457200"/>
+            <a:ext cx="8961120" cy="822960"/>
+          </a:xfrm>
+          <a:prstGeom prst="rect">
+            <a:avLst/>
+          </a:prstGeom>
+          <a:noFill/>
+        </p:spPr>
+        <p:txBody>
+          <a:bodyPr wrap="square">
+            <a:spAutoFit/>
+          </a:bodyPr>
+          <a:lstStyle/>
+          <a:p>
+            <a:r>
+              <a:rPr sz="2400" b="1" i="0">
+                <a:solidFill>
+                  <a:srgbClr val="990000"/>
+                </a:solidFill>
+                <a:latin typeface="Arial"/>
+              </a:rPr>
+              <a:t>References</a:t>
+            </a:r>
+          </a:p>
+        </p:txBody>
+      </p:sp>
+      <p:sp>
+        <p:nvSpPr>
+          <p:cNvPr id="4" name="Rectangle 3"/>
+          <p:cNvSpPr/>
+          <p:nvPr/>
+        </p:nvSpPr>
+        <p:spPr>
+          <a:xfrm>
+            <a:off x="457200" y="1371600"/>
+            <a:ext cx="11247120" cy="27940"/>
+          </a:xfrm>
+          <a:prstGeom prst="rect">
+            <a:avLst/>
+          </a:prstGeom>
+          <a:solidFill>
+            <a:srgbClr val="CC0000"/>
+          </a:solidFill>
+          <a:ln>
+            <a:noFill/>
+          </a:ln>
+        </p:spPr>
+        <p:style>
+          <a:lnRef idx="1">
+            <a:schemeClr val="accent1"/>
+          </a:lnRef>
+          <a:fillRef idx="3">
+            <a:schemeClr val="accent1"/>
+          </a:fillRef>
+          <a:effectRef idx="2">
+            <a:schemeClr val="accent1"/>
+          </a:effectRef>
+          <a:fontRef idx="minor">
+            <a:schemeClr val="lt1"/>
+          </a:fontRef>
+        </p:style>
+        <p:txBody>
+          <a:bodyPr rtlCol="0" anchor="ctr"/>
+          <a:lstStyle/>
+          <a:p>
+            <a:pPr algn="ctr"/>
+          </a:p>
+        </p:txBody>
+      </p:sp>
+      <p:sp>
+        <p:nvSpPr>
+          <p:cNvPr id="5" name="TextBox 4"/>
+          <p:cNvSpPr txBox="1"/>
+          <p:nvPr/>
+        </p:nvSpPr>
+        <p:spPr>
+          <a:xfrm>
+            <a:off x="640080" y="1600200"/>
+            <a:ext cx="10972800" cy="4937760"/>
+          </a:xfrm>
+          <a:prstGeom prst="rect">
+            <a:avLst/>
+          </a:prstGeom>
+          <a:noFill/>
+        </p:spPr>
+        <p:txBody>
+          <a:bodyPr wrap="square">
+            <a:spAutoFit/>
+          </a:bodyPr>
+          <a:lstStyle/>
+          <a:p>
+            <a:pPr>
+              <a:spcAft>
+                <a:spcPts val="500"/>
+              </a:spcAft>
+            </a:pPr>
+            <a:r>
+              <a:rPr sz="1200" b="0" i="0">
+                <a:solidFill>
+                  <a:srgbClr val="1A1A1A"/>
+                </a:solidFill>
+                <a:latin typeface="Arial"/>
+              </a:rPr>
+              <a:t>•  El Aoud, S., &amp; Abergel, F. (2015). A stochastic control approach to option market making. Market Microstructure and Liquidity, 1(1), 1550006.</a:t>
+            </a:r>
+          </a:p>
+          <a:p>
+            <a:pPr>
+              <a:spcAft>
+                <a:spcPts val="500"/>
+              </a:spcAft>
+            </a:pPr>
+            <a:r>
+              <a:rPr sz="1200" b="0" i="0">
+                <a:solidFill>
+                  <a:srgbClr val="1A1A1A"/>
+                </a:solidFill>
+                <a:latin typeface="Arial"/>
+              </a:rPr>
+              <a:t>•  Taleb, N. N. (1997). Dynamic Hedging: Managing Vanilla and Exotic Options. Wiley.</a:t>
+            </a:r>
+          </a:p>
+          <a:p>
+            <a:pPr>
+              <a:spcAft>
+                <a:spcPts val="500"/>
+              </a:spcAft>
+            </a:pPr>
+            <a:r>
+              <a:rPr sz="1200" b="0" i="0">
+                <a:solidFill>
+                  <a:srgbClr val="1A1A1A"/>
+                </a:solidFill>
+                <a:latin typeface="Arial"/>
+              </a:rPr>
+              <a:t>•  Cartea, Jaikumar, &amp; Penalva (2015). Algorithmic and High-Frequency Trading, Ch. 11.</a:t>
             </a:r>
           </a:p>
         </p:txBody>

--- a/weekly_presentations/week08_options_mm_hedging.pptx
+++ b/weekly_presentations/week08_options_mm_hedging.pptx
@@ -16,6 +16,7 @@
     <p:sldId id="264" r:id="rId15"/>
     <p:sldId id="265" r:id="rId16"/>
     <p:sldId id="266" r:id="rId17"/>
+    <p:sldId id="267" r:id="rId18"/>
   </p:sldIdLst>
   <p:sldSz cx="12191695" cy="6858000" type="screen4x3"/>
   <p:notesSz cx="6858000" cy="9144000"/>
@@ -3303,7 +3304,7 @@
           <a:noFill/>
         </p:spPr>
         <p:txBody>
-          <a:bodyPr wrap="square">
+          <a:bodyPr wrap="none">
             <a:spAutoFit/>
           </a:bodyPr>
           <a:lstStyle/>
@@ -3315,7 +3316,7 @@
                 </a:solidFill>
                 <a:latin typeface="Arial"/>
               </a:rPr>
-              <a:t>Reading</a:t>
+              <a:t>Glossary — Key Terms</a:t>
             </a:r>
           </a:p>
         </p:txBody>
@@ -3387,17 +3388,176 @@
           <a:p>
             <a:pPr>
               <a:spcAft>
-                <a:spcPts val="800"/>
+                <a:spcPts val="700"/>
               </a:spcAft>
             </a:pPr>
             <a:r>
-              <a:rPr sz="1700" b="0" i="0">
+              <a:rPr sz="1500" b="1" i="0">
+                <a:solidFill>
+                  <a:srgbClr val="CC0000"/>
+                </a:solidFill>
+                <a:latin typeface="Arial"/>
+              </a:rPr>
+              <a:t>Greek inventory vector — </a:t>
+            </a:r>
+            <a:r>
+              <a:rPr sz="1500" b="0" i="0">
                 <a:solidFill>
                   <a:srgbClr val="1A1A1A"/>
                 </a:solidFill>
                 <a:latin typeface="Arial"/>
               </a:rPr>
-              <a:t>•  El Aoud-Abergel (2015); Taleb (1997); Cartea et al., Ch. 11</a:t>
+              <a:t>aggregated (delta, gamma, vega, ...) exposure of the book</a:t>
+            </a:r>
+          </a:p>
+          <a:p>
+            <a:pPr>
+              <a:spcAft>
+                <a:spcPts val="700"/>
+              </a:spcAft>
+            </a:pPr>
+            <a:r>
+              <a:rPr sz="1500" b="1" i="0">
+                <a:solidFill>
+                  <a:srgbClr val="CC0000"/>
+                </a:solidFill>
+                <a:latin typeface="Arial"/>
+              </a:rPr>
+              <a:t>Quadratic penalty — </a:t>
+            </a:r>
+            <a:r>
+              <a:rPr sz="1500" b="0" i="0">
+                <a:solidFill>
+                  <a:srgbClr val="1A1A1A"/>
+                </a:solidFill>
+                <a:latin typeface="Arial"/>
+              </a:rPr>
+              <a:t>the risk term (1/2) q^T Sigma q on the Greek vector</a:t>
+            </a:r>
+          </a:p>
+          <a:p>
+            <a:pPr>
+              <a:spcAft>
+                <a:spcPts val="700"/>
+              </a:spcAft>
+            </a:pPr>
+            <a:r>
+              <a:rPr sz="1500" b="1" i="0">
+                <a:solidFill>
+                  <a:srgbClr val="CC0000"/>
+                </a:solidFill>
+                <a:latin typeface="Arial"/>
+              </a:rPr>
+              <a:t>Delta hedging — </a:t>
+            </a:r>
+            <a:r>
+              <a:rPr sz="1500" b="0" i="0">
+                <a:solidFill>
+                  <a:srgbClr val="1A1A1A"/>
+                </a:solidFill>
+                <a:latin typeface="Arial"/>
+              </a:rPr>
+              <a:t>neutralizing directional risk using the underlying or a perpetual</a:t>
+            </a:r>
+          </a:p>
+          <a:p>
+            <a:pPr>
+              <a:spcAft>
+                <a:spcPts val="700"/>
+              </a:spcAft>
+            </a:pPr>
+            <a:r>
+              <a:rPr sz="1500" b="1" i="0">
+                <a:solidFill>
+                  <a:srgbClr val="CC0000"/>
+                </a:solidFill>
+                <a:latin typeface="Arial"/>
+              </a:rPr>
+              <a:t>Gamma scalping — </a:t>
+            </a:r>
+            <a:r>
+              <a:rPr sz="1500" b="0" i="0">
+                <a:solidFill>
+                  <a:srgbClr val="1A1A1A"/>
+                </a:solidFill>
+                <a:latin typeface="Arial"/>
+              </a:rPr>
+              <a:t>P&amp;L earned by re-hedging a long-gamma position</a:t>
+            </a:r>
+          </a:p>
+          <a:p>
+            <a:pPr>
+              <a:spcAft>
+                <a:spcPts val="700"/>
+              </a:spcAft>
+            </a:pPr>
+            <a:r>
+              <a:rPr sz="1500" b="1" i="0">
+                <a:solidFill>
+                  <a:srgbClr val="CC0000"/>
+                </a:solidFill>
+                <a:latin typeface="Arial"/>
+              </a:rPr>
+              <a:t>Gamma-theta-variance identity — </a:t>
+            </a:r>
+            <a:r>
+              <a:rPr sz="1500" b="0" i="0">
+                <a:solidFill>
+                  <a:srgbClr val="1A1A1A"/>
+                </a:solidFill>
+                <a:latin typeface="Arial"/>
+              </a:rPr>
+              <a:t>hedged P&amp;L = (1/2) Gamma S^2 (realized var - implied var) dt</a:t>
+            </a:r>
+          </a:p>
+          <a:p>
+            <a:pPr>
+              <a:spcAft>
+                <a:spcPts val="700"/>
+              </a:spcAft>
+            </a:pPr>
+            <a:r>
+              <a:rPr sz="1500" b="1" i="0">
+                <a:solidFill>
+                  <a:srgbClr val="CC0000"/>
+                </a:solidFill>
+                <a:latin typeface="Arial"/>
+              </a:rPr>
+              <a:t>Funding rate — </a:t>
+            </a:r>
+            <a:r>
+              <a:rPr sz="1500" b="0" i="0">
+                <a:solidFill>
+                  <a:srgbClr val="1A1A1A"/>
+                </a:solidFill>
+                <a:latin typeface="Arial"/>
+              </a:rPr>
+              <a:t>periodic payment between perpetual-swap longs and shorts</a:t>
+            </a:r>
+          </a:p>
+          <a:p>
+            <a:pPr>
+              <a:spcAft>
+                <a:spcPts val="700"/>
+              </a:spcAft>
+            </a:pPr>
+            <a:r>
+              <a:rPr sz="1500" b="1" i="0">
+                <a:solidFill>
+                  <a:srgbClr val="CC0000"/>
+                </a:solidFill>
+                <a:latin typeface="Arial"/>
+              </a:rPr>
+              <a:t>El Aoud-Abergel — </a:t>
+            </a:r>
+            <a:r>
+              <a:rPr sz="1500" b="0" i="0">
+                <a:solidFill>
+                  <a:srgbClr val="1A1A1A"/>
+                </a:solidFill>
+                <a:latin typeface="Arial"/>
+              </a:rPr>
+              <a:t>the multi-Greek option market-making framework</a:t>
             </a:r>
           </a:p>
         </p:txBody>
@@ -3473,6 +3633,164 @@
                 </a:solidFill>
                 <a:latin typeface="Arial"/>
               </a:rPr>
+              <a:t>Reading</a:t>
+            </a:r>
+          </a:p>
+        </p:txBody>
+      </p:sp>
+      <p:sp>
+        <p:nvSpPr>
+          <p:cNvPr id="4" name="Rectangle 3"/>
+          <p:cNvSpPr/>
+          <p:nvPr/>
+        </p:nvSpPr>
+        <p:spPr>
+          <a:xfrm>
+            <a:off x="457200" y="1371600"/>
+            <a:ext cx="11247120" cy="27940"/>
+          </a:xfrm>
+          <a:prstGeom prst="rect">
+            <a:avLst/>
+          </a:prstGeom>
+          <a:solidFill>
+            <a:srgbClr val="CC0000"/>
+          </a:solidFill>
+          <a:ln>
+            <a:noFill/>
+          </a:ln>
+        </p:spPr>
+        <p:style>
+          <a:lnRef idx="1">
+            <a:schemeClr val="accent1"/>
+          </a:lnRef>
+          <a:fillRef idx="3">
+            <a:schemeClr val="accent1"/>
+          </a:fillRef>
+          <a:effectRef idx="2">
+            <a:schemeClr val="accent1"/>
+          </a:effectRef>
+          <a:fontRef idx="minor">
+            <a:schemeClr val="lt1"/>
+          </a:fontRef>
+        </p:style>
+        <p:txBody>
+          <a:bodyPr rtlCol="0" anchor="ctr"/>
+          <a:lstStyle/>
+          <a:p>
+            <a:pPr algn="ctr"/>
+          </a:p>
+        </p:txBody>
+      </p:sp>
+      <p:sp>
+        <p:nvSpPr>
+          <p:cNvPr id="5" name="TextBox 4"/>
+          <p:cNvSpPr txBox="1"/>
+          <p:nvPr/>
+        </p:nvSpPr>
+        <p:spPr>
+          <a:xfrm>
+            <a:off x="640080" y="1600200"/>
+            <a:ext cx="10972800" cy="4937760"/>
+          </a:xfrm>
+          <a:prstGeom prst="rect">
+            <a:avLst/>
+          </a:prstGeom>
+          <a:noFill/>
+        </p:spPr>
+        <p:txBody>
+          <a:bodyPr wrap="square">
+            <a:spAutoFit/>
+          </a:bodyPr>
+          <a:lstStyle/>
+          <a:p>
+            <a:pPr>
+              <a:spcAft>
+                <a:spcPts val="800"/>
+              </a:spcAft>
+            </a:pPr>
+            <a:r>
+              <a:rPr sz="1700" b="0" i="0">
+                <a:solidFill>
+                  <a:srgbClr val="1A1A1A"/>
+                </a:solidFill>
+                <a:latin typeface="Arial"/>
+              </a:rPr>
+              <a:t>•  El Aoud-Abergel (2015); Taleb (1997); Cartea et al., Ch. 11</a:t>
+            </a:r>
+          </a:p>
+        </p:txBody>
+      </p:sp>
+    </p:spTree>
+  </p:cSld>
+  <p:clrMapOvr>
+    <a:masterClrMapping/>
+  </p:clrMapOvr>
+</p:sld>
+</file>
+
+<file path=ppt/slides/slide12.xml><?xml version="1.0" encoding="utf-8"?>
+<p:sld xmlns:a="http://schemas.openxmlformats.org/drawingml/2006/main" xmlns:p="http://schemas.openxmlformats.org/presentationml/2006/main" xmlns:r="http://schemas.openxmlformats.org/officeDocument/2006/relationships">
+  <p:cSld>
+    <p:spTree>
+      <p:nvGrpSpPr>
+        <p:cNvPr id="1" name=""/>
+        <p:cNvGrpSpPr/>
+        <p:nvPr/>
+      </p:nvGrpSpPr>
+      <p:grpSpPr/>
+      <p:pic>
+        <p:nvPicPr>
+          <p:cNvPr id="2" name="Picture 1" descr="ncsu_logo.png"/>
+          <p:cNvPicPr>
+            <a:picLocks noChangeAspect="1"/>
+          </p:cNvPicPr>
+          <p:nvPr/>
+        </p:nvPicPr>
+        <p:blipFill>
+          <a:blip r:embed="rId2"/>
+          <a:stretch>
+            <a:fillRect/>
+          </a:stretch>
+        </p:blipFill>
+        <p:spPr>
+          <a:xfrm>
+            <a:off x="9784080" y="274320"/>
+            <a:ext cx="2011680" cy="316653"/>
+          </a:xfrm>
+          <a:prstGeom prst="rect">
+            <a:avLst/>
+          </a:prstGeom>
+        </p:spPr>
+      </p:pic>
+      <p:sp>
+        <p:nvSpPr>
+          <p:cNvPr id="3" name="TextBox 2"/>
+          <p:cNvSpPr txBox="1"/>
+          <p:nvPr/>
+        </p:nvSpPr>
+        <p:spPr>
+          <a:xfrm>
+            <a:off x="457200" y="457200"/>
+            <a:ext cx="8961120" cy="822960"/>
+          </a:xfrm>
+          <a:prstGeom prst="rect">
+            <a:avLst/>
+          </a:prstGeom>
+          <a:noFill/>
+        </p:spPr>
+        <p:txBody>
+          <a:bodyPr wrap="square">
+            <a:spAutoFit/>
+          </a:bodyPr>
+          <a:lstStyle/>
+          <a:p>
+            <a:r>
+              <a:rPr sz="2400" b="1" i="0">
+                <a:solidFill>
+                  <a:srgbClr val="990000"/>
+                </a:solidFill>
+                <a:latin typeface="Arial"/>
+              </a:rPr>
               <a:t>References</a:t>
             </a:r>
           </a:p>
@@ -3663,7 +3981,7 @@
                 </a:solidFill>
                 <a:latin typeface="Arial"/>
               </a:rPr>
-              <a:t>Learning Objectives</a:t>
+              <a:t>Contents</a:t>
             </a:r>
           </a:p>
         </p:txBody>
@@ -3735,49 +4053,161 @@
           <a:p>
             <a:pPr>
               <a:spcAft>
-                <a:spcPts val="800"/>
+                <a:spcPts val="500"/>
               </a:spcAft>
             </a:pPr>
             <a:r>
-              <a:rPr sz="1700" b="0" i="0">
+              <a:rPr sz="1200" b="0" i="0">
                 <a:solidFill>
                   <a:srgbClr val="1A1A1A"/>
                 </a:solidFill>
                 <a:latin typeface="Arial"/>
               </a:rPr>
-              <a:t>•  Set up the El Aoud-Abergel multi-Greek framework</a:t>
+              <a:t>•  Learning objectives</a:t>
             </a:r>
           </a:p>
           <a:p>
             <a:pPr>
               <a:spcAft>
-                <a:spcPts val="800"/>
+                <a:spcPts val="500"/>
               </a:spcAft>
             </a:pPr>
             <a:r>
-              <a:rPr sz="1700" b="0" i="0">
+              <a:rPr sz="1200" b="0" i="0">
                 <a:solidFill>
                   <a:srgbClr val="1A1A1A"/>
                 </a:solidFill>
                 <a:latin typeface="Arial"/>
               </a:rPr>
-              <a:t>•  Understand the quadratic inventory penalty</a:t>
+              <a:t>•  Lecture 1: Multi-Greek Inventory &amp; HJB</a:t>
             </a:r>
           </a:p>
           <a:p>
             <a:pPr>
               <a:spcAft>
-                <a:spcPts val="800"/>
+                <a:spcPts val="500"/>
               </a:spcAft>
             </a:pPr>
             <a:r>
-              <a:rPr sz="1700" b="0" i="0">
+              <a:rPr sz="1200" b="0" i="0">
                 <a:solidFill>
                   <a:srgbClr val="1A1A1A"/>
                 </a:solidFill>
                 <a:latin typeface="Arial"/>
               </a:rPr>
-              <a:t>•  Quantify the P&amp;L of a delta-hedged book</a:t>
+              <a:t>•  Lecture 2: Dynamic Hedging</a:t>
+            </a:r>
+          </a:p>
+          <a:p>
+            <a:pPr>
+              <a:spcAft>
+                <a:spcPts val="500"/>
+              </a:spcAft>
+            </a:pPr>
+            <a:r>
+              <a:rPr sz="1200" b="0" i="0">
+                <a:solidFill>
+                  <a:srgbClr val="1A1A1A"/>
+                </a:solidFill>
+                <a:latin typeface="Arial"/>
+              </a:rPr>
+              <a:t>•  Illustration</a:t>
+            </a:r>
+          </a:p>
+          <a:p>
+            <a:pPr>
+              <a:spcAft>
+                <a:spcPts val="500"/>
+              </a:spcAft>
+            </a:pPr>
+            <a:r>
+              <a:rPr sz="1200" b="0" i="0">
+                <a:solidFill>
+                  <a:srgbClr val="1A1A1A"/>
+                </a:solidFill>
+                <a:latin typeface="Arial"/>
+              </a:rPr>
+              <a:t>•  Derivation &amp; rationale</a:t>
+            </a:r>
+          </a:p>
+          <a:p>
+            <a:pPr>
+              <a:spcAft>
+                <a:spcPts val="500"/>
+              </a:spcAft>
+            </a:pPr>
+            <a:r>
+              <a:rPr sz="1200" b="0" i="0">
+                <a:solidFill>
+                  <a:srgbClr val="1A1A1A"/>
+                </a:solidFill>
+                <a:latin typeface="Arial"/>
+              </a:rPr>
+              <a:t>•  Getting the data from Coincall</a:t>
+            </a:r>
+          </a:p>
+          <a:p>
+            <a:pPr>
+              <a:spcAft>
+                <a:spcPts val="500"/>
+              </a:spcAft>
+            </a:pPr>
+            <a:r>
+              <a:rPr sz="1200" b="0" i="0">
+                <a:solidFill>
+                  <a:srgbClr val="1A1A1A"/>
+                </a:solidFill>
+                <a:latin typeface="Arial"/>
+              </a:rPr>
+              <a:t>•  Code: week8_hedge.py</a:t>
+            </a:r>
+          </a:p>
+          <a:p>
+            <a:pPr>
+              <a:spcAft>
+                <a:spcPts val="500"/>
+              </a:spcAft>
+            </a:pPr>
+            <a:r>
+              <a:rPr sz="1200" b="0" i="0">
+                <a:solidFill>
+                  <a:srgbClr val="1A1A1A"/>
+                </a:solidFill>
+                <a:latin typeface="Arial"/>
+              </a:rPr>
+              <a:t>•  Glossary of key terms</a:t>
+            </a:r>
+          </a:p>
+          <a:p>
+            <a:pPr>
+              <a:spcAft>
+                <a:spcPts val="500"/>
+              </a:spcAft>
+            </a:pPr>
+            <a:r>
+              <a:rPr sz="1200" b="0" i="0">
+                <a:solidFill>
+                  <a:srgbClr val="1A1A1A"/>
+                </a:solidFill>
+                <a:latin typeface="Arial"/>
+              </a:rPr>
+              <a:t>•  Reading</a:t>
+            </a:r>
+          </a:p>
+          <a:p>
+            <a:pPr>
+              <a:spcAft>
+                <a:spcPts val="500"/>
+              </a:spcAft>
+            </a:pPr>
+            <a:r>
+              <a:rPr sz="1200" b="0" i="0">
+                <a:solidFill>
+                  <a:srgbClr val="1A1A1A"/>
+                </a:solidFill>
+                <a:latin typeface="Arial"/>
+              </a:rPr>
+              <a:t>•  References</a:t>
             </a:r>
           </a:p>
         </p:txBody>
@@ -3853,7 +4283,7 @@
                 </a:solidFill>
                 <a:latin typeface="Arial"/>
               </a:rPr>
-              <a:t>Lecture 1: Multi-Greek Inventory &amp; HJB</a:t>
+              <a:t>Learning Objectives</a:t>
             </a:r>
           </a:p>
         </p:txBody>
@@ -3935,7 +4365,7 @@
                 </a:solidFill>
                 <a:latin typeface="Arial"/>
               </a:rPr>
-              <a:t>•  Inventory becomes a vector q = (Delta, Gamma, vega, ...)</a:t>
+              <a:t>•  Set up the El Aoud-Abergel multi-Greek framework</a:t>
             </a:r>
           </a:p>
           <a:p>
@@ -3951,7 +4381,7 @@
                 </a:solidFill>
                 <a:latin typeface="Arial"/>
               </a:rPr>
-              <a:t>•  Quadratic inventory penalty; reduces to AS in 1-D</a:t>
+              <a:t>•  Understand the quadratic inventory penalty</a:t>
             </a:r>
           </a:p>
           <a:p>
@@ -3967,7 +4397,7 @@
                 </a:solidFill>
                 <a:latin typeface="Arial"/>
               </a:rPr>
-              <a:t>•  Multi-Greek HJB and the separation ansatz</a:t>
+              <a:t>•  Quantify the P&amp;L of a delta-hedged book</a:t>
             </a:r>
           </a:p>
         </p:txBody>
@@ -4043,7 +4473,7 @@
                 </a:solidFill>
                 <a:latin typeface="Arial"/>
               </a:rPr>
-              <a:t>Lecture 2: Dynamic Hedging</a:t>
+              <a:t>Lecture 1: Multi-Greek Inventory &amp; HJB</a:t>
             </a:r>
           </a:p>
         </p:txBody>
@@ -4125,7 +4555,7 @@
                 </a:solidFill>
                 <a:latin typeface="Arial"/>
               </a:rPr>
-              <a:t>•  Continuous vs discrete delta hedging</a:t>
+              <a:t>•  Inventory becomes a vector q = (Delta, Gamma, vega, ...)</a:t>
             </a:r>
           </a:p>
           <a:p>
@@ -4141,7 +4571,7 @@
                 </a:solidFill>
                 <a:latin typeface="Arial"/>
               </a:rPr>
-              <a:t>•  The gamma-theta-variance identity</a:t>
+              <a:t>•  Quadratic inventory penalty; reduces to AS in 1-D</a:t>
             </a:r>
           </a:p>
           <a:p>
@@ -4157,7 +4587,7 @@
                 </a:solidFill>
                 <a:latin typeface="Arial"/>
               </a:rPr>
-              <a:t>•  Perp futures as the hedge instrument; funding cost</a:t>
+              <a:t>•  Multi-Greek HJB and the separation ansatz</a:t>
             </a:r>
           </a:p>
         </p:txBody>
@@ -4196,7 +4626,7 @@
         </p:blipFill>
         <p:spPr>
           <a:xfrm>
-            <a:off x="9784080" y="228600"/>
+            <a:off x="9784080" y="274320"/>
             <a:ext cx="2011680" cy="316653"/>
           </a:xfrm>
           <a:prstGeom prst="rect">
@@ -4212,8 +4642,8 @@
         </p:nvSpPr>
         <p:spPr>
           <a:xfrm>
-            <a:off x="457200" y="411480"/>
-            <a:ext cx="8961120" cy="731520"/>
+            <a:off x="457200" y="457200"/>
+            <a:ext cx="8961120" cy="822960"/>
           </a:xfrm>
           <a:prstGeom prst="rect">
             <a:avLst/>
@@ -4221,47 +4651,137 @@
           <a:noFill/>
         </p:spPr>
         <p:txBody>
-          <a:bodyPr wrap="none">
+          <a:bodyPr wrap="square">
             <a:spAutoFit/>
           </a:bodyPr>
           <a:lstStyle/>
           <a:p>
             <a:r>
-              <a:rPr sz="2200" b="1" i="0">
+              <a:rPr sz="2400" b="1" i="0">
                 <a:solidFill>
                   <a:srgbClr val="990000"/>
                 </a:solidFill>
                 <a:latin typeface="Arial"/>
               </a:rPr>
-              <a:t>Illustration</a:t>
-            </a:r>
-          </a:p>
-        </p:txBody>
-      </p:sp>
-      <p:pic>
-        <p:nvPicPr>
-          <p:cNvPr id="4" name="Picture 3" descr="week08.png"/>
-          <p:cNvPicPr>
-            <a:picLocks noChangeAspect="1"/>
-          </p:cNvPicPr>
+              <a:t>Lecture 2: Dynamic Hedging</a:t>
+            </a:r>
+          </a:p>
+        </p:txBody>
+      </p:sp>
+      <p:sp>
+        <p:nvSpPr>
+          <p:cNvPr id="4" name="Rectangle 3"/>
+          <p:cNvSpPr/>
           <p:nvPr/>
-        </p:nvPicPr>
-        <p:blipFill>
-          <a:blip r:embed="rId3"/>
-          <a:stretch>
-            <a:fillRect/>
-          </a:stretch>
-        </p:blipFill>
-        <p:spPr>
-          <a:xfrm>
-            <a:off x="1280160" y="1371600"/>
-            <a:ext cx="9601200" cy="5225143"/>
+        </p:nvSpPr>
+        <p:spPr>
+          <a:xfrm>
+            <a:off x="457200" y="1371600"/>
+            <a:ext cx="11247120" cy="27940"/>
           </a:xfrm>
           <a:prstGeom prst="rect">
             <a:avLst/>
           </a:prstGeom>
-        </p:spPr>
-      </p:pic>
+          <a:solidFill>
+            <a:srgbClr val="CC0000"/>
+          </a:solidFill>
+          <a:ln>
+            <a:noFill/>
+          </a:ln>
+        </p:spPr>
+        <p:style>
+          <a:lnRef idx="1">
+            <a:schemeClr val="accent1"/>
+          </a:lnRef>
+          <a:fillRef idx="3">
+            <a:schemeClr val="accent1"/>
+          </a:fillRef>
+          <a:effectRef idx="2">
+            <a:schemeClr val="accent1"/>
+          </a:effectRef>
+          <a:fontRef idx="minor">
+            <a:schemeClr val="lt1"/>
+          </a:fontRef>
+        </p:style>
+        <p:txBody>
+          <a:bodyPr rtlCol="0" anchor="ctr"/>
+          <a:lstStyle/>
+          <a:p>
+            <a:pPr algn="ctr"/>
+          </a:p>
+        </p:txBody>
+      </p:sp>
+      <p:sp>
+        <p:nvSpPr>
+          <p:cNvPr id="5" name="TextBox 4"/>
+          <p:cNvSpPr txBox="1"/>
+          <p:nvPr/>
+        </p:nvSpPr>
+        <p:spPr>
+          <a:xfrm>
+            <a:off x="640080" y="1600200"/>
+            <a:ext cx="10972800" cy="4937760"/>
+          </a:xfrm>
+          <a:prstGeom prst="rect">
+            <a:avLst/>
+          </a:prstGeom>
+          <a:noFill/>
+        </p:spPr>
+        <p:txBody>
+          <a:bodyPr wrap="square">
+            <a:spAutoFit/>
+          </a:bodyPr>
+          <a:lstStyle/>
+          <a:p>
+            <a:pPr>
+              <a:spcAft>
+                <a:spcPts val="800"/>
+              </a:spcAft>
+            </a:pPr>
+            <a:r>
+              <a:rPr sz="1700" b="0" i="0">
+                <a:solidFill>
+                  <a:srgbClr val="1A1A1A"/>
+                </a:solidFill>
+                <a:latin typeface="Arial"/>
+              </a:rPr>
+              <a:t>•  Continuous vs discrete delta hedging</a:t>
+            </a:r>
+          </a:p>
+          <a:p>
+            <a:pPr>
+              <a:spcAft>
+                <a:spcPts val="800"/>
+              </a:spcAft>
+            </a:pPr>
+            <a:r>
+              <a:rPr sz="1700" b="0" i="0">
+                <a:solidFill>
+                  <a:srgbClr val="1A1A1A"/>
+                </a:solidFill>
+                <a:latin typeface="Arial"/>
+              </a:rPr>
+              <a:t>•  The gamma-theta-variance identity</a:t>
+            </a:r>
+          </a:p>
+          <a:p>
+            <a:pPr>
+              <a:spcAft>
+                <a:spcPts val="800"/>
+              </a:spcAft>
+            </a:pPr>
+            <a:r>
+              <a:rPr sz="1700" b="0" i="0">
+                <a:solidFill>
+                  <a:srgbClr val="1A1A1A"/>
+                </a:solidFill>
+                <a:latin typeface="Arial"/>
+              </a:rPr>
+              <a:t>•  Perp futures as the hedge instrument; funding cost</a:t>
+            </a:r>
+          </a:p>
+        </p:txBody>
+      </p:sp>
     </p:spTree>
   </p:cSld>
   <p:clrMapOvr>
@@ -4296,7 +4816,7 @@
         </p:blipFill>
         <p:spPr>
           <a:xfrm>
-            <a:off x="9784080" y="274320"/>
+            <a:off x="9784080" y="228600"/>
             <a:ext cx="2011680" cy="316653"/>
           </a:xfrm>
           <a:prstGeom prst="rect">
@@ -4312,8 +4832,8 @@
         </p:nvSpPr>
         <p:spPr>
           <a:xfrm>
-            <a:off x="457200" y="457200"/>
-            <a:ext cx="8961120" cy="822960"/>
+            <a:off x="457200" y="411480"/>
+            <a:ext cx="8961120" cy="731520"/>
           </a:xfrm>
           <a:prstGeom prst="rect">
             <a:avLst/>
@@ -4321,164 +4841,47 @@
           <a:noFill/>
         </p:spPr>
         <p:txBody>
-          <a:bodyPr wrap="square">
+          <a:bodyPr wrap="none">
             <a:spAutoFit/>
           </a:bodyPr>
           <a:lstStyle/>
           <a:p>
             <a:r>
-              <a:rPr sz="2400" b="1" i="0">
+              <a:rPr sz="2200" b="1" i="0">
                 <a:solidFill>
                   <a:srgbClr val="990000"/>
                 </a:solidFill>
                 <a:latin typeface="Arial"/>
               </a:rPr>
-              <a:t>Key Equations &amp; Why We Choose Them</a:t>
-            </a:r>
-          </a:p>
-          <a:p>
-            <a:r>
-              <a:rPr sz="1300" b="0" i="1">
-                <a:solidFill>
-                  <a:srgbClr val="6D6D6D"/>
-                </a:solidFill>
-                <a:latin typeface="Arial"/>
-              </a:rPr>
-              <a:t>Full derivations in the PDF deck</a:t>
-            </a:r>
-          </a:p>
-        </p:txBody>
-      </p:sp>
-      <p:sp>
-        <p:nvSpPr>
-          <p:cNvPr id="4" name="Rectangle 3"/>
-          <p:cNvSpPr/>
+              <a:t>Illustration</a:t>
+            </a:r>
+          </a:p>
+        </p:txBody>
+      </p:sp>
+      <p:pic>
+        <p:nvPicPr>
+          <p:cNvPr id="4" name="Picture 3" descr="week08.png"/>
+          <p:cNvPicPr>
+            <a:picLocks noChangeAspect="1"/>
+          </p:cNvPicPr>
           <p:nvPr/>
-        </p:nvSpPr>
-        <p:spPr>
-          <a:xfrm>
-            <a:off x="457200" y="1371600"/>
-            <a:ext cx="11247120" cy="27940"/>
+        </p:nvPicPr>
+        <p:blipFill>
+          <a:blip r:embed="rId3"/>
+          <a:stretch>
+            <a:fillRect/>
+          </a:stretch>
+        </p:blipFill>
+        <p:spPr>
+          <a:xfrm>
+            <a:off x="1280160" y="1371600"/>
+            <a:ext cx="9601200" cy="5225143"/>
           </a:xfrm>
           <a:prstGeom prst="rect">
             <a:avLst/>
           </a:prstGeom>
-          <a:solidFill>
-            <a:srgbClr val="CC0000"/>
-          </a:solidFill>
-          <a:ln>
-            <a:noFill/>
-          </a:ln>
-        </p:spPr>
-        <p:style>
-          <a:lnRef idx="1">
-            <a:schemeClr val="accent1"/>
-          </a:lnRef>
-          <a:fillRef idx="3">
-            <a:schemeClr val="accent1"/>
-          </a:fillRef>
-          <a:effectRef idx="2">
-            <a:schemeClr val="accent1"/>
-          </a:effectRef>
-          <a:fontRef idx="minor">
-            <a:schemeClr val="lt1"/>
-          </a:fontRef>
-        </p:style>
-        <p:txBody>
-          <a:bodyPr rtlCol="0" anchor="ctr"/>
-          <a:lstStyle/>
-          <a:p>
-            <a:pPr algn="ctr"/>
-          </a:p>
-        </p:txBody>
-      </p:sp>
-      <p:sp>
-        <p:nvSpPr>
-          <p:cNvPr id="5" name="TextBox 4"/>
-          <p:cNvSpPr txBox="1"/>
-          <p:nvPr/>
-        </p:nvSpPr>
-        <p:spPr>
-          <a:xfrm>
-            <a:off x="640080" y="1600200"/>
-            <a:ext cx="10972800" cy="4937760"/>
-          </a:xfrm>
-          <a:prstGeom prst="rect">
-            <a:avLst/>
-          </a:prstGeom>
-          <a:noFill/>
-        </p:spPr>
-        <p:txBody>
-          <a:bodyPr wrap="square">
-            <a:spAutoFit/>
-          </a:bodyPr>
-          <a:lstStyle/>
-          <a:p>
-            <a:pPr>
-              <a:spcAft>
-                <a:spcPts val="500"/>
-              </a:spcAft>
-            </a:pPr>
-            <a:r>
-              <a:rPr sz="1200" b="0" i="0">
-                <a:solidFill>
-                  <a:srgbClr val="1A1A1A"/>
-                </a:solidFill>
-                <a:latin typeface="Consolas"/>
-              </a:rPr>
-              <a:t>    \text{penalty} = \tfrac12\, q^{\mathsf T} \Sigma\, q</a:t>
-            </a:r>
-          </a:p>
-          <a:p>
-            <a:pPr>
-              <a:spcAft>
-                <a:spcPts val="500"/>
-              </a:spcAft>
-            </a:pPr>
-            <a:r>
-              <a:rPr sz="1200" b="0" i="0">
-                <a:solidFill>
-                  <a:srgbClr val="1A1A1A"/>
-                </a:solidFill>
-                <a:latin typeface="Arial"/>
-              </a:rPr>
-              <a:t>•  why: Inventory risk for an options book is multi-dimensional (delta, gamma, vega...). A quadratic form is the local (mean-variance) risk of the Greek vector; $\Sigma$ is calibrated to the empirical covariance of the Greeks, so cross-risks are priced, not just diagonal ones. It reduces to AS's $q^2$ penalty when there is one Greek.</a:t>
-            </a:r>
-          </a:p>
-          <a:p>
-            <a:pPr>
-              <a:spcAft>
-                <a:spcPts val="500"/>
-              </a:spcAft>
-            </a:pPr>
-            <a:r>
-              <a:rPr sz="1200" b="0" i="0">
-                <a:solidFill>
-                  <a:srgbClr val="1A1A1A"/>
-                </a:solidFill>
-                <a:latin typeface="Consolas"/>
-              </a:rPr>
-              <a:t>    d\Pi = \tfrac12\,\Gamma\,S^2\big(\sigma_{\text{real}}^2-\sigma_{\text{impl}}^2\big)\,dt</a:t>
-            </a:r>
-          </a:p>
-          <a:p>
-            <a:pPr>
-              <a:spcAft>
-                <a:spcPts val="500"/>
-              </a:spcAft>
-            </a:pPr>
-            <a:r>
-              <a:rPr sz="1200" b="0" i="0">
-                <a:solidFill>
-                  <a:srgbClr val="1A1A1A"/>
-                </a:solidFill>
-                <a:latin typeface="Arial"/>
-              </a:rPr>
-              <a:t>•  why: The gamma-theta-variance identity: a delta-hedged option earns (or pays) the gap between realized and implied variance, scaled by dollar gamma. This single equation explains ~80% of a hedged book's daily P&amp;L and motivates why we track gamma at all.</a:t>
-            </a:r>
-          </a:p>
-        </p:txBody>
-      </p:sp>
+        </p:spPr>
+      </p:pic>
     </p:spTree>
   </p:cSld>
   <p:clrMapOvr>
@@ -4550,7 +4953,7 @@
                 </a:solidFill>
                 <a:latin typeface="Arial"/>
               </a:rPr>
-              <a:t>Getting the Data from Coincall</a:t>
+              <a:t>Key Equations &amp; Why We Choose Them</a:t>
             </a:r>
           </a:p>
           <a:p>
@@ -4561,7 +4964,7 @@
                 </a:solidFill>
                 <a:latin typeface="Arial"/>
               </a:rPr>
-              <a:t>Cross-check exact paths at https://docs.coincall.com/</a:t>
+              <a:t>Full derivations in the PDF deck</a:t>
             </a:r>
           </a:p>
         </p:txBody>
@@ -4641,9 +5044,9 @@
                 <a:solidFill>
                   <a:srgbClr val="1A1A1A"/>
                 </a:solidFill>
-                <a:latin typeface="Arial"/>
-              </a:rPr>
-              <a:t>•  Greeks per contract (for the inventory vector and Sigma):</a:t>
+                <a:latin typeface="Consolas"/>
+              </a:rPr>
+              <a:t>    \text{penalty} = \tfrac12\, q^{\mathsf T} \Sigma\, q</a:t>
             </a:r>
           </a:p>
           <a:p>
@@ -4657,9 +5060,9 @@
                 <a:solidFill>
                   <a:srgbClr val="1A1A1A"/>
                 </a:solidFill>
-                <a:latin typeface="Consolas"/>
-              </a:rPr>
-              <a:t>    GET /open/option/detail/v1/{symbol}  -&gt; delta, gamma, vega, theta, rho</a:t>
+                <a:latin typeface="Arial"/>
+              </a:rPr>
+              <a:t>•  why: Inventory risk for an options book is multi-dimensional (delta, gamma, vega...). A quadratic form is the local (mean-variance) risk of the Greek vector; $\Sigma$ is calibrated to the empirical covariance of the Greeks, so cross-risks are priced, not just diagonal ones. It reduces to AS's $q^2$ penalty when there is one Greek.</a:t>
             </a:r>
           </a:p>
           <a:p>
@@ -4673,9 +5076,9 @@
                 <a:solidFill>
                   <a:srgbClr val="1A1A1A"/>
                 </a:solidFill>
-                <a:latin typeface="Arial"/>
-              </a:rPr>
-              <a:t>•  Hedge instrument + carry:</a:t>
+                <a:latin typeface="Consolas"/>
+              </a:rPr>
+              <a:t>    d\Pi = \tfrac12\,\Gamma\,S^2\big(\sigma_{\text{real}}^2-\sigma_{\text{impl}}^2\big)\,dt</a:t>
             </a:r>
           </a:p>
           <a:p>
@@ -4689,41 +5092,9 @@
                 <a:solidFill>
                   <a:srgbClr val="1A1A1A"/>
                 </a:solidFill>
-                <a:latin typeface="Consolas"/>
-              </a:rPr>
-              <a:t>    Perp book:  GET /open/futures/order/orderbook/v1/{symbol}</a:t>
-            </a:r>
-          </a:p>
-          <a:p>
-            <a:pPr>
-              <a:spcAft>
-                <a:spcPts val="500"/>
-              </a:spcAft>
-            </a:pPr>
-            <a:r>
-              <a:rPr sz="1200" b="0" i="0">
-                <a:solidFill>
-                  <a:srgbClr val="1A1A1A"/>
-                </a:solidFill>
-                <a:latin typeface="Consolas"/>
-              </a:rPr>
-              <a:t>    Funding:    GET /open/public/fundingRate/v1?symbol=BTCUSD</a:t>
-            </a:r>
-          </a:p>
-          <a:p>
-            <a:pPr>
-              <a:spcAft>
-                <a:spcPts val="500"/>
-              </a:spcAft>
-            </a:pPr>
-            <a:r>
-              <a:rPr sz="1200" b="0" i="0">
-                <a:solidFill>
-                  <a:srgbClr val="1A1A1A"/>
-                </a:solidFill>
                 <a:latin typeface="Arial"/>
               </a:rPr>
-              <a:t>•  Offline: coincall_funding_rates_2025Q4.parquet for hedge-cost accounting</a:t>
+              <a:t>•  why: The gamma-theta-variance identity: a delta-hedged option earns (or pays) the gap between realized and implied variance, scaled by dollar gamma. This single equation explains ~80% of a hedged book's daily P&amp;L and motivates why we track gamma at all.</a:t>
             </a:r>
           </a:p>
         </p:txBody>
@@ -4737,260 +5108,6 @@
 </file>
 
 <file path=ppt/slides/slide8.xml><?xml version="1.0" encoding="utf-8"?>
-<p:sld xmlns:a="http://schemas.openxmlformats.org/drawingml/2006/main" xmlns:p="http://schemas.openxmlformats.org/presentationml/2006/main" xmlns:r="http://schemas.openxmlformats.org/officeDocument/2006/relationships">
-  <p:cSld>
-    <p:spTree>
-      <p:nvGrpSpPr>
-        <p:cNvPr id="1" name=""/>
-        <p:cNvGrpSpPr/>
-        <p:nvPr/>
-      </p:nvGrpSpPr>
-      <p:grpSpPr/>
-      <p:sp>
-        <p:nvSpPr>
-          <p:cNvPr id="2" name="TextBox 1"/>
-          <p:cNvSpPr txBox="1"/>
-          <p:nvPr/>
-        </p:nvSpPr>
-        <p:spPr>
-          <a:xfrm>
-            <a:off x="457200" y="365760"/>
-            <a:ext cx="11247120" cy="640080"/>
-          </a:xfrm>
-          <a:prstGeom prst="rect">
-            <a:avLst/>
-          </a:prstGeom>
-          <a:noFill/>
-        </p:spPr>
-        <p:txBody>
-          <a:bodyPr wrap="none">
-            <a:spAutoFit/>
-          </a:bodyPr>
-          <a:lstStyle/>
-          <a:p>
-            <a:r>
-              <a:rPr sz="1800" b="1" i="0">
-                <a:solidFill>
-                  <a:srgbClr val="990000"/>
-                </a:solidFill>
-                <a:latin typeface="Arial"/>
-              </a:rPr>
-              <a:t>Code — week8_hedge.py -- aggregate Greeks &amp; threshold delta hedge</a:t>
-            </a:r>
-          </a:p>
-        </p:txBody>
-      </p:sp>
-      <p:sp>
-        <p:nvSpPr>
-          <p:cNvPr id="3" name="Rectangle 2"/>
-          <p:cNvSpPr/>
-          <p:nvPr/>
-        </p:nvSpPr>
-        <p:spPr>
-          <a:xfrm>
-            <a:off x="457200" y="1097280"/>
-            <a:ext cx="11247120" cy="5394960"/>
-          </a:xfrm>
-          <a:prstGeom prst="rect">
-            <a:avLst/>
-          </a:prstGeom>
-          <a:solidFill>
-            <a:srgbClr val="F5F5F5"/>
-          </a:solidFill>
-          <a:ln w="9525">
-            <a:solidFill>
-              <a:srgbClr val="6D6D6D"/>
-            </a:solidFill>
-          </a:ln>
-        </p:spPr>
-        <p:style>
-          <a:lnRef idx="1">
-            <a:schemeClr val="accent1"/>
-          </a:lnRef>
-          <a:fillRef idx="3">
-            <a:schemeClr val="accent1"/>
-          </a:fillRef>
-          <a:effectRef idx="2">
-            <a:schemeClr val="accent1"/>
-          </a:effectRef>
-          <a:fontRef idx="minor">
-            <a:schemeClr val="lt1"/>
-          </a:fontRef>
-        </p:style>
-        <p:txBody>
-          <a:bodyPr rtlCol="0" anchor="ctr" wrap="square" lIns="182880" tIns="91440"/>
-          <a:lstStyle/>
-          <a:p>
-            <a:pPr algn="ctr">
-              <a:spcAft>
-                <a:spcPts val="0"/>
-              </a:spcAft>
-            </a:pPr>
-            <a:r>
-              <a:rPr sz="1100" b="0" i="0">
-                <a:solidFill>
-                  <a:srgbClr val="1A1A1A"/>
-                </a:solidFill>
-                <a:latin typeface="Consolas"/>
-              </a:rPr>
-              <a:t>import torch</a:t>
-            </a:r>
-          </a:p>
-          <a:p>
-            <a:pPr>
-              <a:spcAft>
-                <a:spcPts val="0"/>
-              </a:spcAft>
-            </a:pPr>
-            <a:r>
-              <a:rPr sz="1100" b="0" i="0">
-                <a:solidFill>
-                  <a:srgbClr val="1A1A1A"/>
-                </a:solidFill>
-                <a:latin typeface="Consolas"/>
-              </a:rPr>
-              <a:t>def book_greeks(positions, greeks):</a:t>
-            </a:r>
-          </a:p>
-          <a:p>
-            <a:pPr>
-              <a:spcAft>
-                <a:spcPts val="0"/>
-              </a:spcAft>
-            </a:pPr>
-            <a:r>
-              <a:rPr sz="1100" b="0" i="0">
-                <a:solidFill>
-                  <a:srgbClr val="1A1A1A"/>
-                </a:solidFill>
-                <a:latin typeface="Consolas"/>
-              </a:rPr>
-              <a:t>    # positions: (n,), greeks: (n,5) columns [delta,gamma,vega,theta,rho]</a:t>
-            </a:r>
-          </a:p>
-          <a:p>
-            <a:pPr>
-              <a:spcAft>
-                <a:spcPts val="0"/>
-              </a:spcAft>
-            </a:pPr>
-            <a:r>
-              <a:rPr sz="1100" b="0" i="0">
-                <a:solidFill>
-                  <a:srgbClr val="1A1A1A"/>
-                </a:solidFill>
-                <a:latin typeface="Consolas"/>
-              </a:rPr>
-              <a:t>    return (positions[:, None] * greeks).sum(0)      # aggregate inventory vector</a:t>
-            </a:r>
-          </a:p>
-          <a:p>
-            <a:pPr>
-              <a:spcAft>
-                <a:spcPts val="0"/>
-              </a:spcAft>
-            </a:pPr>
-            <a:r>
-              <a:rPr sz="1100" b="0" i="0">
-                <a:solidFill>
-                  <a:srgbClr val="1A1A1A"/>
-                </a:solidFill>
-                <a:latin typeface="Consolas"/>
-              </a:rPr>
-              <a:t> </a:t>
-            </a:r>
-          </a:p>
-          <a:p>
-            <a:pPr>
-              <a:spcAft>
-                <a:spcPts val="0"/>
-              </a:spcAft>
-            </a:pPr>
-            <a:r>
-              <a:rPr sz="1100" b="0" i="0">
-                <a:solidFill>
-                  <a:srgbClr val="1A1A1A"/>
-                </a:solidFill>
-                <a:latin typeface="Consolas"/>
-              </a:rPr>
-              <a:t>def delta_hedge(net_delta, perp_pos, threshold=0.1):</a:t>
-            </a:r>
-          </a:p>
-          <a:p>
-            <a:pPr>
-              <a:spcAft>
-                <a:spcPts val="0"/>
-              </a:spcAft>
-            </a:pPr>
-            <a:r>
-              <a:rPr sz="1100" b="0" i="0">
-                <a:solidFill>
-                  <a:srgbClr val="1A1A1A"/>
-                </a:solidFill>
-                <a:latin typeface="Consolas"/>
-              </a:rPr>
-              <a:t>    if net_delta.abs() &gt; threshold:                  # rebalance only when breached</a:t>
-            </a:r>
-          </a:p>
-          <a:p>
-            <a:pPr>
-              <a:spcAft>
-                <a:spcPts val="0"/>
-              </a:spcAft>
-            </a:pPr>
-            <a:r>
-              <a:rPr sz="1100" b="0" i="0">
-                <a:solidFill>
-                  <a:srgbClr val="1A1A1A"/>
-                </a:solidFill>
-                <a:latin typeface="Consolas"/>
-              </a:rPr>
-              <a:t>        trade = -net_delta                           # hedge with perp futures</a:t>
-            </a:r>
-          </a:p>
-          <a:p>
-            <a:pPr>
-              <a:spcAft>
-                <a:spcPts val="0"/>
-              </a:spcAft>
-            </a:pPr>
-            <a:r>
-              <a:rPr sz="1100" b="0" i="0">
-                <a:solidFill>
-                  <a:srgbClr val="1A1A1A"/>
-                </a:solidFill>
-                <a:latin typeface="Consolas"/>
-              </a:rPr>
-              <a:t>        return perp_pos + trade, trade</a:t>
-            </a:r>
-          </a:p>
-          <a:p>
-            <a:pPr>
-              <a:spcAft>
-                <a:spcPts val="0"/>
-              </a:spcAft>
-            </a:pPr>
-            <a:r>
-              <a:rPr sz="1100" b="0" i="0">
-                <a:solidFill>
-                  <a:srgbClr val="1A1A1A"/>
-                </a:solidFill>
-                <a:latin typeface="Consolas"/>
-              </a:rPr>
-              <a:t>    return perp_pos, torch.tensor(0.0)</a:t>
-            </a:r>
-          </a:p>
-        </p:txBody>
-      </p:sp>
-    </p:spTree>
-  </p:cSld>
-  <p:clrMapOvr>
-    <a:masterClrMapping/>
-  </p:clrMapOvr>
-</p:sld>
-</file>
-
-<file path=ppt/slides/slide9.xml><?xml version="1.0" encoding="utf-8"?>
 <p:sld xmlns:a="http://schemas.openxmlformats.org/drawingml/2006/main" xmlns:p="http://schemas.openxmlformats.org/presentationml/2006/main" xmlns:r="http://schemas.openxmlformats.org/officeDocument/2006/relationships">
   <p:cSld>
     <p:spTree>
@@ -5041,7 +5158,7 @@
           <a:noFill/>
         </p:spPr>
         <p:txBody>
-          <a:bodyPr wrap="none">
+          <a:bodyPr wrap="square">
             <a:spAutoFit/>
           </a:bodyPr>
           <a:lstStyle/>
@@ -5053,7 +5170,18 @@
                 </a:solidFill>
                 <a:latin typeface="Arial"/>
               </a:rPr>
-              <a:t>Glossary — Key Terms</a:t>
+              <a:t>Getting the Data from Coincall</a:t>
+            </a:r>
+          </a:p>
+          <a:p>
+            <a:r>
+              <a:rPr sz="1300" b="0" i="1">
+                <a:solidFill>
+                  <a:srgbClr val="6D6D6D"/>
+                </a:solidFill>
+                <a:latin typeface="Arial"/>
+              </a:rPr>
+              <a:t>Cross-check exact paths at https://docs.coincall.com/</a:t>
             </a:r>
           </a:p>
         </p:txBody>
@@ -5125,176 +5253,351 @@
           <a:p>
             <a:pPr>
               <a:spcAft>
-                <a:spcPts val="700"/>
+                <a:spcPts val="500"/>
               </a:spcAft>
             </a:pPr>
             <a:r>
-              <a:rPr sz="1500" b="1" i="0">
-                <a:solidFill>
-                  <a:srgbClr val="CC0000"/>
+              <a:rPr sz="1200" b="0" i="0">
+                <a:solidFill>
+                  <a:srgbClr val="1A1A1A"/>
                 </a:solidFill>
                 <a:latin typeface="Arial"/>
               </a:rPr>
-              <a:t>Greek inventory vector — </a:t>
-            </a:r>
-            <a:r>
-              <a:rPr sz="1500" b="0" i="0">
-                <a:solidFill>
-                  <a:srgbClr val="1A1A1A"/>
-                </a:solidFill>
-                <a:latin typeface="Arial"/>
-              </a:rPr>
-              <a:t>aggregated (delta, gamma, vega, ...) exposure of the book</a:t>
+              <a:t>•  Greeks per contract (for the inventory vector and Sigma):</a:t>
             </a:r>
           </a:p>
           <a:p>
             <a:pPr>
               <a:spcAft>
-                <a:spcPts val="700"/>
+                <a:spcPts val="500"/>
               </a:spcAft>
             </a:pPr>
             <a:r>
-              <a:rPr sz="1500" b="1" i="0">
-                <a:solidFill>
-                  <a:srgbClr val="CC0000"/>
-                </a:solidFill>
-                <a:latin typeface="Arial"/>
-              </a:rPr>
-              <a:t>Quadratic penalty — </a:t>
-            </a:r>
-            <a:r>
-              <a:rPr sz="1500" b="0" i="0">
+              <a:rPr sz="1200" b="0" i="0">
                 <a:solidFill>
                   <a:srgbClr val="1A1A1A"/>
                 </a:solidFill>
-                <a:latin typeface="Arial"/>
-              </a:rPr>
-              <a:t>the risk term (1/2) q^T Sigma q on the Greek vector</a:t>
+                <a:latin typeface="Consolas"/>
+              </a:rPr>
+              <a:t>    GET /open/option/detail/v1/{symbol}  -&gt; delta, gamma, vega, theta, rho</a:t>
             </a:r>
           </a:p>
           <a:p>
             <a:pPr>
               <a:spcAft>
-                <a:spcPts val="700"/>
+                <a:spcPts val="500"/>
               </a:spcAft>
             </a:pPr>
             <a:r>
-              <a:rPr sz="1500" b="1" i="0">
-                <a:solidFill>
-                  <a:srgbClr val="CC0000"/>
+              <a:rPr sz="1200" b="0" i="0">
+                <a:solidFill>
+                  <a:srgbClr val="1A1A1A"/>
                 </a:solidFill>
                 <a:latin typeface="Arial"/>
               </a:rPr>
-              <a:t>Delta hedging — </a:t>
-            </a:r>
-            <a:r>
-              <a:rPr sz="1500" b="0" i="0">
-                <a:solidFill>
-                  <a:srgbClr val="1A1A1A"/>
-                </a:solidFill>
-                <a:latin typeface="Arial"/>
-              </a:rPr>
-              <a:t>neutralizing directional risk using the underlying or a perpetual</a:t>
+              <a:t>•  Hedge instrument + carry:</a:t>
             </a:r>
           </a:p>
           <a:p>
             <a:pPr>
               <a:spcAft>
-                <a:spcPts val="700"/>
+                <a:spcPts val="500"/>
               </a:spcAft>
             </a:pPr>
             <a:r>
-              <a:rPr sz="1500" b="1" i="0">
-                <a:solidFill>
-                  <a:srgbClr val="CC0000"/>
-                </a:solidFill>
-                <a:latin typeface="Arial"/>
-              </a:rPr>
-              <a:t>Gamma scalping — </a:t>
-            </a:r>
-            <a:r>
-              <a:rPr sz="1500" b="0" i="0">
+              <a:rPr sz="1200" b="0" i="0">
                 <a:solidFill>
                   <a:srgbClr val="1A1A1A"/>
                 </a:solidFill>
-                <a:latin typeface="Arial"/>
-              </a:rPr>
-              <a:t>P&amp;L earned by re-hedging a long-gamma position</a:t>
+                <a:latin typeface="Consolas"/>
+              </a:rPr>
+              <a:t>    Perp book:  GET /open/futures/order/orderbook/v1/{symbol}</a:t>
             </a:r>
           </a:p>
           <a:p>
             <a:pPr>
               <a:spcAft>
-                <a:spcPts val="700"/>
+                <a:spcPts val="500"/>
               </a:spcAft>
             </a:pPr>
             <a:r>
-              <a:rPr sz="1500" b="1" i="0">
-                <a:solidFill>
-                  <a:srgbClr val="CC0000"/>
-                </a:solidFill>
-                <a:latin typeface="Arial"/>
-              </a:rPr>
-              <a:t>Gamma-theta-variance identity — </a:t>
-            </a:r>
-            <a:r>
-              <a:rPr sz="1500" b="0" i="0">
+              <a:rPr sz="1200" b="0" i="0">
                 <a:solidFill>
                   <a:srgbClr val="1A1A1A"/>
                 </a:solidFill>
-                <a:latin typeface="Arial"/>
-              </a:rPr>
-              <a:t>hedged P&amp;L = (1/2) Gamma S^2 (realized var - implied var) dt</a:t>
+                <a:latin typeface="Consolas"/>
+              </a:rPr>
+              <a:t>    Funding:    GET /open/public/fundingRate/v1?symbol=BTCUSD</a:t>
             </a:r>
           </a:p>
           <a:p>
             <a:pPr>
               <a:spcAft>
-                <a:spcPts val="700"/>
+                <a:spcPts val="500"/>
               </a:spcAft>
             </a:pPr>
             <a:r>
-              <a:rPr sz="1500" b="1" i="0">
-                <a:solidFill>
-                  <a:srgbClr val="CC0000"/>
+              <a:rPr sz="1200" b="0" i="0">
+                <a:solidFill>
+                  <a:srgbClr val="1A1A1A"/>
                 </a:solidFill>
                 <a:latin typeface="Arial"/>
               </a:rPr>
-              <a:t>Funding rate — </a:t>
-            </a:r>
-            <a:r>
-              <a:rPr sz="1500" b="0" i="0">
+              <a:t>•  Offline: coincall_funding_rates_2025Q4.parquet for hedge-cost accounting</a:t>
+            </a:r>
+          </a:p>
+        </p:txBody>
+      </p:sp>
+    </p:spTree>
+  </p:cSld>
+  <p:clrMapOvr>
+    <a:masterClrMapping/>
+  </p:clrMapOvr>
+</p:sld>
+</file>
+
+<file path=ppt/slides/slide9.xml><?xml version="1.0" encoding="utf-8"?>
+<p:sld xmlns:a="http://schemas.openxmlformats.org/drawingml/2006/main" xmlns:p="http://schemas.openxmlformats.org/presentationml/2006/main" xmlns:r="http://schemas.openxmlformats.org/officeDocument/2006/relationships">
+  <p:cSld>
+    <p:spTree>
+      <p:nvGrpSpPr>
+        <p:cNvPr id="1" name=""/>
+        <p:cNvGrpSpPr/>
+        <p:nvPr/>
+      </p:nvGrpSpPr>
+      <p:grpSpPr/>
+      <p:sp>
+        <p:nvSpPr>
+          <p:cNvPr id="2" name="TextBox 1"/>
+          <p:cNvSpPr txBox="1"/>
+          <p:nvPr/>
+        </p:nvSpPr>
+        <p:spPr>
+          <a:xfrm>
+            <a:off x="457200" y="365760"/>
+            <a:ext cx="11247120" cy="640080"/>
+          </a:xfrm>
+          <a:prstGeom prst="rect">
+            <a:avLst/>
+          </a:prstGeom>
+          <a:noFill/>
+        </p:spPr>
+        <p:txBody>
+          <a:bodyPr wrap="none">
+            <a:spAutoFit/>
+          </a:bodyPr>
+          <a:lstStyle/>
+          <a:p>
+            <a:r>
+              <a:rPr sz="1800" b="1" i="0">
+                <a:solidFill>
+                  <a:srgbClr val="990000"/>
+                </a:solidFill>
+                <a:latin typeface="Arial"/>
+              </a:rPr>
+              <a:t>Code — week8_hedge.py -- aggregate Greeks &amp; threshold delta hedge</a:t>
+            </a:r>
+          </a:p>
+        </p:txBody>
+      </p:sp>
+      <p:sp>
+        <p:nvSpPr>
+          <p:cNvPr id="3" name="Rectangle 2"/>
+          <p:cNvSpPr/>
+          <p:nvPr/>
+        </p:nvSpPr>
+        <p:spPr>
+          <a:xfrm>
+            <a:off x="457200" y="1097280"/>
+            <a:ext cx="11247120" cy="5394960"/>
+          </a:xfrm>
+          <a:prstGeom prst="rect">
+            <a:avLst/>
+          </a:prstGeom>
+          <a:solidFill>
+            <a:srgbClr val="F5F5F5"/>
+          </a:solidFill>
+          <a:ln w="9525">
+            <a:solidFill>
+              <a:srgbClr val="6D6D6D"/>
+            </a:solidFill>
+          </a:ln>
+        </p:spPr>
+        <p:style>
+          <a:lnRef idx="1">
+            <a:schemeClr val="accent1"/>
+          </a:lnRef>
+          <a:fillRef idx="3">
+            <a:schemeClr val="accent1"/>
+          </a:fillRef>
+          <a:effectRef idx="2">
+            <a:schemeClr val="accent1"/>
+          </a:effectRef>
+          <a:fontRef idx="minor">
+            <a:schemeClr val="lt1"/>
+          </a:fontRef>
+        </p:style>
+        <p:txBody>
+          <a:bodyPr rtlCol="0" anchor="ctr" wrap="square" lIns="182880" tIns="91440"/>
+          <a:lstStyle/>
+          <a:p>
+            <a:pPr algn="ctr">
+              <a:spcAft>
+                <a:spcPts val="0"/>
+              </a:spcAft>
+            </a:pPr>
+            <a:r>
+              <a:rPr sz="1100" b="0" i="0">
                 <a:solidFill>
                   <a:srgbClr val="1A1A1A"/>
                 </a:solidFill>
-                <a:latin typeface="Arial"/>
-              </a:rPr>
-              <a:t>periodic payment between perpetual-swap longs and shorts</a:t>
+                <a:latin typeface="Consolas"/>
+              </a:rPr>
+              <a:t>import torch</a:t>
             </a:r>
           </a:p>
           <a:p>
             <a:pPr>
               <a:spcAft>
-                <a:spcPts val="700"/>
+                <a:spcPts val="0"/>
               </a:spcAft>
             </a:pPr>
             <a:r>
-              <a:rPr sz="1500" b="1" i="0">
-                <a:solidFill>
-                  <a:srgbClr val="CC0000"/>
-                </a:solidFill>
-                <a:latin typeface="Arial"/>
-              </a:rPr>
-              <a:t>El Aoud-Abergel — </a:t>
-            </a:r>
-            <a:r>
-              <a:rPr sz="1500" b="0" i="0">
+              <a:rPr sz="1100" b="0" i="0">
                 <a:solidFill>
                   <a:srgbClr val="1A1A1A"/>
                 </a:solidFill>
-                <a:latin typeface="Arial"/>
-              </a:rPr>
-              <a:t>the multi-Greek option market-making framework</a:t>
+                <a:latin typeface="Consolas"/>
+              </a:rPr>
+              <a:t>def book_greeks(positions, greeks):</a:t>
+            </a:r>
+          </a:p>
+          <a:p>
+            <a:pPr>
+              <a:spcAft>
+                <a:spcPts val="0"/>
+              </a:spcAft>
+            </a:pPr>
+            <a:r>
+              <a:rPr sz="1100" b="0" i="0">
+                <a:solidFill>
+                  <a:srgbClr val="1A1A1A"/>
+                </a:solidFill>
+                <a:latin typeface="Consolas"/>
+              </a:rPr>
+              <a:t>    # positions: (n,), greeks: (n,5) columns [delta,gamma,vega,theta,rho]</a:t>
+            </a:r>
+          </a:p>
+          <a:p>
+            <a:pPr>
+              <a:spcAft>
+                <a:spcPts val="0"/>
+              </a:spcAft>
+            </a:pPr>
+            <a:r>
+              <a:rPr sz="1100" b="0" i="0">
+                <a:solidFill>
+                  <a:srgbClr val="1A1A1A"/>
+                </a:solidFill>
+                <a:latin typeface="Consolas"/>
+              </a:rPr>
+              <a:t>    return (positions[:, None] * greeks).sum(0)      # aggregate inventory vector</a:t>
+            </a:r>
+          </a:p>
+          <a:p>
+            <a:pPr>
+              <a:spcAft>
+                <a:spcPts val="0"/>
+              </a:spcAft>
+            </a:pPr>
+            <a:r>
+              <a:rPr sz="1100" b="0" i="0">
+                <a:solidFill>
+                  <a:srgbClr val="1A1A1A"/>
+                </a:solidFill>
+                <a:latin typeface="Consolas"/>
+              </a:rPr>
+              <a:t> </a:t>
+            </a:r>
+          </a:p>
+          <a:p>
+            <a:pPr>
+              <a:spcAft>
+                <a:spcPts val="0"/>
+              </a:spcAft>
+            </a:pPr>
+            <a:r>
+              <a:rPr sz="1100" b="0" i="0">
+                <a:solidFill>
+                  <a:srgbClr val="1A1A1A"/>
+                </a:solidFill>
+                <a:latin typeface="Consolas"/>
+              </a:rPr>
+              <a:t>def delta_hedge(net_delta, perp_pos, threshold=0.1):</a:t>
+            </a:r>
+          </a:p>
+          <a:p>
+            <a:pPr>
+              <a:spcAft>
+                <a:spcPts val="0"/>
+              </a:spcAft>
+            </a:pPr>
+            <a:r>
+              <a:rPr sz="1100" b="0" i="0">
+                <a:solidFill>
+                  <a:srgbClr val="1A1A1A"/>
+                </a:solidFill>
+                <a:latin typeface="Consolas"/>
+              </a:rPr>
+              <a:t>    if net_delta.abs() &gt; threshold:                  # rebalance only when breached</a:t>
+            </a:r>
+          </a:p>
+          <a:p>
+            <a:pPr>
+              <a:spcAft>
+                <a:spcPts val="0"/>
+              </a:spcAft>
+            </a:pPr>
+            <a:r>
+              <a:rPr sz="1100" b="0" i="0">
+                <a:solidFill>
+                  <a:srgbClr val="1A1A1A"/>
+                </a:solidFill>
+                <a:latin typeface="Consolas"/>
+              </a:rPr>
+              <a:t>        trade = -net_delta                           # hedge with perp futures</a:t>
+            </a:r>
+          </a:p>
+          <a:p>
+            <a:pPr>
+              <a:spcAft>
+                <a:spcPts val="0"/>
+              </a:spcAft>
+            </a:pPr>
+            <a:r>
+              <a:rPr sz="1100" b="0" i="0">
+                <a:solidFill>
+                  <a:srgbClr val="1A1A1A"/>
+                </a:solidFill>
+                <a:latin typeface="Consolas"/>
+              </a:rPr>
+              <a:t>        return perp_pos + trade, trade</a:t>
+            </a:r>
+          </a:p>
+          <a:p>
+            <a:pPr>
+              <a:spcAft>
+                <a:spcPts val="0"/>
+              </a:spcAft>
+            </a:pPr>
+            <a:r>
+              <a:rPr sz="1100" b="0" i="0">
+                <a:solidFill>
+                  <a:srgbClr val="1A1A1A"/>
+                </a:solidFill>
+                <a:latin typeface="Consolas"/>
+              </a:rPr>
+              <a:t>    return perp_pos, torch.tensor(0.0)</a:t>
             </a:r>
           </a:p>
         </p:txBody>
